--- a/AUTOCAD INTECAP/apuntes powerpoint/Miercoles 25 febrero.pptx
+++ b/AUTOCAD INTECAP/apuntes powerpoint/Miercoles 25 febrero.pptx
@@ -121,6 +121,93 @@
 </p:presentation>
 </file>
 
+<file path=ppt/ink/ink1.xml><?xml version="1.0" encoding="utf-8"?>
+<inkml:ink xmlns:inkml="http://www.w3.org/2003/InkML">
+  <inkml:definitions>
+    <inkml:context xml:id="ctx0">
+      <inkml:inkSource xml:id="inkSrc0">
+        <inkml:traceFormat>
+          <inkml:channel name="X" type="integer" min="-2.14748E9" max="2.14748E9" units="cm"/>
+          <inkml:channel name="Y" type="integer" min="-2.14748E9" max="2.14748E9" units="cm"/>
+        </inkml:traceFormat>
+        <inkml:channelProperties>
+          <inkml:channelProperty channel="X" name="resolution" value="1000" units="1/cm"/>
+          <inkml:channelProperty channel="Y" name="resolution" value="1000" units="1/cm"/>
+        </inkml:channelProperties>
+      </inkml:inkSource>
+      <inkml:timestamp xml:id="ts0" timeString="2026-03-01T05:41:30.210"/>
+    </inkml:context>
+    <inkml:brush xml:id="br0">
+      <inkml:brushProperty name="width" value="0.4" units="cm"/>
+      <inkml:brushProperty name="height" value="0.8" units="cm"/>
+      <inkml:brushProperty name="color" value="#FFFC00"/>
+      <inkml:brushProperty name="tip" value="rectangle"/>
+      <inkml:brushProperty name="rasterOp" value="maskPen"/>
+      <inkml:brushProperty name="ignorePressure" value="1"/>
+    </inkml:brush>
+  </inkml:definitions>
+  <inkml:trace contextRef="#ctx0" brushRef="#br0">0 1,'197'0,"984"15,725 24,-1851-39</inkml:trace>
+</inkml:ink>
+</file>
+
+<file path=ppt/ink/ink2.xml><?xml version="1.0" encoding="utf-8"?>
+<inkml:ink xmlns:inkml="http://www.w3.org/2003/InkML">
+  <inkml:definitions>
+    <inkml:context xml:id="ctx0">
+      <inkml:inkSource xml:id="inkSrc0">
+        <inkml:traceFormat>
+          <inkml:channel name="X" type="integer" min="-2.14748E9" max="2.14748E9" units="cm"/>
+          <inkml:channel name="Y" type="integer" min="-2.14748E9" max="2.14748E9" units="cm"/>
+        </inkml:traceFormat>
+        <inkml:channelProperties>
+          <inkml:channelProperty channel="X" name="resolution" value="1000" units="1/cm"/>
+          <inkml:channelProperty channel="Y" name="resolution" value="1000" units="1/cm"/>
+        </inkml:channelProperties>
+      </inkml:inkSource>
+      <inkml:timestamp xml:id="ts0" timeString="2026-03-01T05:41:32.389"/>
+    </inkml:context>
+    <inkml:brush xml:id="br0">
+      <inkml:brushProperty name="width" value="0.4" units="cm"/>
+      <inkml:brushProperty name="height" value="0.8" units="cm"/>
+      <inkml:brushProperty name="color" value="#FFFC00"/>
+      <inkml:brushProperty name="tip" value="rectangle"/>
+      <inkml:brushProperty name="rasterOp" value="maskPen"/>
+      <inkml:brushProperty name="ignorePressure" value="1"/>
+    </inkml:brush>
+  </inkml:definitions>
+  <inkml:trace contextRef="#ctx0" brushRef="#br0">52 926,'4'-1,"0"0,1 0,-1 0,0-1,1 0,-1 1,0-1,0-1,-1 1,1-1,0 1,5-7,0 2,162-143,-55 44,267-213,-247 208,-116 95,-13 11,-1 0,1 0,-1 0,0-1,-1 0,1 0,-1-1,5-8,-9 15,-1-1,0 1,0 0,0 0,0 0,1-1,-1 1,0 0,0 0,0 0,0-1,0 1,0 0,0 0,0-1,0 1,0 0,1 0,-1-1,0 1,-1 0,1 0,0-1,0 1,0 0,0 0,0-1,0 1,0 0,0 0,0-1,0 1,-1 0,1 0,0 0,0-1,0 1,0 0,-1 0,1 0,0-1,0 1,0 0,-1 0,1 0,0 0,0 0,-1 0,1 0,0 0,0-1,-1 1,1 0,0 0,0 0,-1 0,1 0,0 0,0 0,-1 1,1-1,0 0,0 0,-1 0,1 0,0 0,0 0,-1 1,-19 7,-11 10,2 1,0 2,-25 24,36-29,0 1,2 1,0 0,1 1,-17 29,28-40,0-1,1 1,-1 0,1 0,-3 13,6-19,0 0,-1 1,1-1,0 0,0 0,0 1,0-1,1 0,-1 0,0 0,1 1,0-1,-1 0,1 0,0 0,0 0,0 0,0 0,1-1,-1 1,1 0,-1 0,1-1,-1 1,4 1,3 2,1 0,0-1,0 0,0-1,0 0,1-1,-1 0,1 0,11 0,16 0,38-2,-40-1,-1-3,0 0,47-13,-67 13,0 0,0-1,0-1,0 0,-1-1,0 0,-1-1,0 0,0-1,16-16,-25 23,-1-1,0 0,1 0,-1 0,0 0,0 0,0 0,-1-1,1 1,-1-1,0 1,0-1,0 0,0 1,-1-1,0 0,1 1,-1-1,-1 0,1 1,0-1,-1 0,0 1,0-1,0 0,0 1,0-1,-1 1,0 0,1 0,-1-1,-1 1,1 0,-3-3,-8-8,0 1,0 1,-1 0,-1 1,-26-16,-18-7,0 2,-2 3,-1 3,-96-27,149 50,-1 0,0 1,0 0,-1 0,1 1,0 0,-20 2,29-1,1 0,0 0,-1 0,1 0,-1 0,1 0,-1 0,1 0,0 0,-1 0,1 0,-1 0,1 0,0 1,-1-1,1 0,0 0,-1 0,1 1,0-1,-1 0,1 0,0 1,-1-1,1 0,0 1,0-1,-1 0,1 1,0-1,0 0,0 1,0-1,-1 1,1-1,0 0,0 1,0-1,0 1,0-1,0 1,0-1,0 0,0 1,0-1,0 1,0-1,1 0,-1 1,0-1,0 1,0-1,1 0,-1 1,0-1,0 0,1 1,-1-1,0 0,0 0,1 1,-1-1,0 0,1 0,0 1,29 22,-18-14,-12-8,0-1,0 1,1-1,-1 1,0-1,0 1,0-1,-1 1,1-1,0 1,0-1,0 1,0-1,0 1,-1-1,1 0,0 1,0-1,-1 1,1-1,0 1,-1-1,1 0,0 1,-1-1,1 0,0 1,-1-1,1 0,-1 0,1 1,-1-1,1 0,-1 0,1 0,-1 1,-18 7,1 0,-25 6,-6 3,-4 3,1 3,2 2,-95 62,117-66,0 1,2 1,0 1,1 2,2 0,1 2,-31 49,47-67,0 0,1 0,0 1,-6 20,11-28,-1-1,0 0,1 1,0-1,-1 0,1 1,0-1,0 1,1-1,-1 0,0 1,1-1,-1 0,1 1,0-1,0 0,0 0,0 0,0 0,0 1,1-2,-1 1,1 0,-1 0,1 0,0-1,0 1,0-1,3 3,1-1,0-1,0 0,1 0,-1 0,0-1,1 0,-1 0,1-1,-1 0,1 0,-1 0,1-1,-1 0,1 0,-1 0,0-1,1 0,-1 0,0-1,6-3,9-5,0-1,-1-1,-1 0,21-19,-18 17,-22 15,0 0,1-1,-1 1,0 0,1 0,-1 0,0 0,1 0,-1 0,1 0,-1 0,0 0,1 0,-1 0,1 0,-1 0,0 0,1 0,-1 0,1 0,-1 0,0 1,1-1,-1 0,0 0,1 0,-1 1,1-1,0 3,0 0,0 0,-1 0,1 0,-1 0,1 0,-1 0,0 0,0 0,-1 4,1-6,0 7,0 0,1 0,0 0,0 0,1 0,0 0,0 0,1-1,0 1,0-1,0 0,1 0,7 10,-4-9,1-1,-1 1,1-1,0-1,1 1,0-1,0-1,0 0,0 0,12 3,28 11,0-3,2-1,0-3,0-3,1-1,0-3,0-2,1-2,-1-3,67-10,-109 10,1 0,-1-1,0-1,0 0,0 0,13-8,-21 11,0 0,0 0,0 0,0 0,-1-1,1 1,0-1,-1 1,1-1,-1 0,1 0,-1 1,0-1,0 0,0 0,0 0,0-1,0 1,0 0,-1 0,1 0,-1-1,1 1,-1 0,0 0,0-1,0 1,-1 0,1-1,0 1,-1 0,1 0,-1 0,-2-4,2 3,-1 0,0 1,-1-1,1 1,0 0,-1 0,0 0,1 0,-1 0,0 0,0 1,0-1,0 1,0 0,0 0,0 0,0 0,-1 1,1-1,0 1,-5 0,1-1,0 1,0 0,-1 1,1-1,0 1,0 1,0 0,-12 4,-23 20,31-17</inkml:trace>
+</inkml:ink>
+</file>
+
+<file path=ppt/ink/ink3.xml><?xml version="1.0" encoding="utf-8"?>
+<inkml:ink xmlns:inkml="http://www.w3.org/2003/InkML">
+  <inkml:definitions>
+    <inkml:context xml:id="ctx0">
+      <inkml:inkSource xml:id="inkSrc0">
+        <inkml:traceFormat>
+          <inkml:channel name="X" type="integer" min="-2.14748E9" max="2.14748E9" units="cm"/>
+          <inkml:channel name="Y" type="integer" min="-2.14748E9" max="2.14748E9" units="cm"/>
+        </inkml:traceFormat>
+        <inkml:channelProperties>
+          <inkml:channelProperty channel="X" name="resolution" value="1000" units="1/cm"/>
+          <inkml:channelProperty channel="Y" name="resolution" value="1000" units="1/cm"/>
+        </inkml:channelProperties>
+      </inkml:inkSource>
+      <inkml:timestamp xml:id="ts0" timeString="2026-03-01T05:41:32.947"/>
+    </inkml:context>
+    <inkml:brush xml:id="br0">
+      <inkml:brushProperty name="width" value="0.4" units="cm"/>
+      <inkml:brushProperty name="height" value="0.8" units="cm"/>
+      <inkml:brushProperty name="color" value="#FFFC00"/>
+      <inkml:brushProperty name="tip" value="rectangle"/>
+      <inkml:brushProperty name="rasterOp" value="maskPen"/>
+      <inkml:brushProperty name="ignorePressure" value="1"/>
+    </inkml:brush>
+  </inkml:definitions>
+  <inkml:trace contextRef="#ctx0" brushRef="#br0">11 1,'-1'-1,"1"1,0 0,-1 0,1 0,0 0,-1 0,1 0,0 0,-1 0,1 0,0 0,-1 1,1-1,0 0,-1 0,1 0,0 0,0 0,-1 1,1-1,0 0,-1 0,1 0,0 1,0-1,0 0,-1 0,1 1,0-1,0 0,0 0,0 1,-1-1,1 0,0 1,0-1,0 1,0-1,0 1,1-1,-1 1,0-1,0 1,1-1,-1 1,0-1,1 1,-1-1,0 1,1-1,-1 0,1 1,-1-1,1 0,-1 1,1-1,-1 0,1 0,-1 1,1-1,-1 0,2 0,43 10,1-2,0-2,84 1,-90-6,701 5,-632-6,-94-1,-10 1,-1-1,1 1,-1 0,1 0,-1 0,1 1,-1-1,1 1,-1 0,0 1,1-1,-1 1,0 0,8 4,-3 5</inkml:trace>
+</inkml:ink>
+</file>
+
 <file path=ppt/slideLayouts/slideLayout1.xml><?xml version="1.0" encoding="utf-8"?>
 <p:sldLayout xmlns:a="http://schemas.openxmlformats.org/drawingml/2006/main" xmlns:r="http://schemas.openxmlformats.org/officeDocument/2006/relationships" xmlns:p="http://schemas.openxmlformats.org/presentationml/2006/main" type="title" preserve="1">
   <p:cSld name="Diapositiva de título">
@@ -270,7 +357,7 @@
           <a:p>
             <a:fld id="{52D666B6-0D01-4F3F-B4BD-5CF4B1F7914B}" type="datetimeFigureOut">
               <a:rPr lang="es-GT" smtClean="0"/>
-              <a:t>27/02/2026</a:t>
+              <a:t>28/02/2026</a:t>
             </a:fld>
             <a:endParaRPr lang="es-GT"/>
           </a:p>
@@ -470,7 +557,7 @@
           <a:p>
             <a:fld id="{52D666B6-0D01-4F3F-B4BD-5CF4B1F7914B}" type="datetimeFigureOut">
               <a:rPr lang="es-GT" smtClean="0"/>
-              <a:t>27/02/2026</a:t>
+              <a:t>28/02/2026</a:t>
             </a:fld>
             <a:endParaRPr lang="es-GT"/>
           </a:p>
@@ -680,7 +767,7 @@
           <a:p>
             <a:fld id="{52D666B6-0D01-4F3F-B4BD-5CF4B1F7914B}" type="datetimeFigureOut">
               <a:rPr lang="es-GT" smtClean="0"/>
-              <a:t>27/02/2026</a:t>
+              <a:t>28/02/2026</a:t>
             </a:fld>
             <a:endParaRPr lang="es-GT"/>
           </a:p>
@@ -880,7 +967,7 @@
           <a:p>
             <a:fld id="{52D666B6-0D01-4F3F-B4BD-5CF4B1F7914B}" type="datetimeFigureOut">
               <a:rPr lang="es-GT" smtClean="0"/>
-              <a:t>27/02/2026</a:t>
+              <a:t>28/02/2026</a:t>
             </a:fld>
             <a:endParaRPr lang="es-GT"/>
           </a:p>
@@ -1156,7 +1243,7 @@
           <a:p>
             <a:fld id="{52D666B6-0D01-4F3F-B4BD-5CF4B1F7914B}" type="datetimeFigureOut">
               <a:rPr lang="es-GT" smtClean="0"/>
-              <a:t>27/02/2026</a:t>
+              <a:t>28/02/2026</a:t>
             </a:fld>
             <a:endParaRPr lang="es-GT"/>
           </a:p>
@@ -1424,7 +1511,7 @@
           <a:p>
             <a:fld id="{52D666B6-0D01-4F3F-B4BD-5CF4B1F7914B}" type="datetimeFigureOut">
               <a:rPr lang="es-GT" smtClean="0"/>
-              <a:t>27/02/2026</a:t>
+              <a:t>28/02/2026</a:t>
             </a:fld>
             <a:endParaRPr lang="es-GT"/>
           </a:p>
@@ -1839,7 +1926,7 @@
           <a:p>
             <a:fld id="{52D666B6-0D01-4F3F-B4BD-5CF4B1F7914B}" type="datetimeFigureOut">
               <a:rPr lang="es-GT" smtClean="0"/>
-              <a:t>27/02/2026</a:t>
+              <a:t>28/02/2026</a:t>
             </a:fld>
             <a:endParaRPr lang="es-GT"/>
           </a:p>
@@ -1981,7 +2068,7 @@
           <a:p>
             <a:fld id="{52D666B6-0D01-4F3F-B4BD-5CF4B1F7914B}" type="datetimeFigureOut">
               <a:rPr lang="es-GT" smtClean="0"/>
-              <a:t>27/02/2026</a:t>
+              <a:t>28/02/2026</a:t>
             </a:fld>
             <a:endParaRPr lang="es-GT"/>
           </a:p>
@@ -2094,7 +2181,7 @@
           <a:p>
             <a:fld id="{52D666B6-0D01-4F3F-B4BD-5CF4B1F7914B}" type="datetimeFigureOut">
               <a:rPr lang="es-GT" smtClean="0"/>
-              <a:t>27/02/2026</a:t>
+              <a:t>28/02/2026</a:t>
             </a:fld>
             <a:endParaRPr lang="es-GT"/>
           </a:p>
@@ -2407,7 +2494,7 @@
           <a:p>
             <a:fld id="{52D666B6-0D01-4F3F-B4BD-5CF4B1F7914B}" type="datetimeFigureOut">
               <a:rPr lang="es-GT" smtClean="0"/>
-              <a:t>27/02/2026</a:t>
+              <a:t>28/02/2026</a:t>
             </a:fld>
             <a:endParaRPr lang="es-GT"/>
           </a:p>
@@ -2696,7 +2783,7 @@
           <a:p>
             <a:fld id="{52D666B6-0D01-4F3F-B4BD-5CF4B1F7914B}" type="datetimeFigureOut">
               <a:rPr lang="es-GT" smtClean="0"/>
-              <a:t>27/02/2026</a:t>
+              <a:t>28/02/2026</a:t>
             </a:fld>
             <a:endParaRPr lang="es-GT"/>
           </a:p>
@@ -2939,7 +3026,7 @@
           <a:p>
             <a:fld id="{52D666B6-0D01-4F3F-B4BD-5CF4B1F7914B}" type="datetimeFigureOut">
               <a:rPr lang="es-GT" smtClean="0"/>
-              <a:t>27/02/2026</a:t>
+              <a:t>28/02/2026</a:t>
             </a:fld>
             <a:endParaRPr lang="es-GT"/>
           </a:p>
@@ -3791,7 +3878,11 @@
           <a:bodyPr/>
           <a:lstStyle/>
           <a:p>
-            <a:endParaRPr lang="es-GT"/>
+            <a:r>
+              <a:rPr lang="af-ZA" dirty="0"/>
+              <a:t>Comando PTYPE para cambiar la caracteristica del punto </a:t>
+            </a:r>
+            <a:endParaRPr lang="es-GT" dirty="0"/>
           </a:p>
         </p:txBody>
       </p:sp>
@@ -3876,7 +3967,18 @@
           <a:bodyPr/>
           <a:lstStyle/>
           <a:p>
-            <a:endParaRPr lang="es-GT"/>
+            <a:r>
+              <a:rPr lang="af-ZA" dirty="0"/>
+              <a:t>Comando divide</a:t>
+            </a:r>
+            <a:br>
+              <a:rPr lang="af-ZA" dirty="0"/>
+            </a:br>
+            <a:r>
+              <a:rPr lang="af-ZA" dirty="0"/>
+              <a:t>activar osnap</a:t>
+            </a:r>
+            <a:endParaRPr lang="es-GT" dirty="0"/>
           </a:p>
         </p:txBody>
       </p:sp>
@@ -3931,10 +4033,197 @@
           <a:bodyPr/>
           <a:lstStyle/>
           <a:p>
-            <a:endParaRPr lang="es-GT"/>
-          </a:p>
-        </p:txBody>
-      </p:sp>
+            <a:r>
+              <a:rPr lang="af-ZA" dirty="0"/>
+              <a:t>Selecciona todos los puntos a todas las figuras </a:t>
+            </a:r>
+            <a:endParaRPr lang="es-GT" dirty="0"/>
+          </a:p>
+        </p:txBody>
+      </p:sp>
+      <p:pic>
+        <p:nvPicPr>
+          <p:cNvPr id="4" name="Imagen 3">
+            <a:extLst>
+              <a:ext uri="{FF2B5EF4-FFF2-40B4-BE49-F238E27FC236}">
+                <a16:creationId xmlns:a16="http://schemas.microsoft.com/office/drawing/2014/main" id="{0830ADC5-B970-6D08-9868-2BBA0AF323CA}"/>
+              </a:ext>
+            </a:extLst>
+          </p:cNvPr>
+          <p:cNvPicPr>
+            <a:picLocks noChangeAspect="1"/>
+          </p:cNvPicPr>
+          <p:nvPr/>
+        </p:nvPicPr>
+        <p:blipFill>
+          <a:blip r:embed="rId2"/>
+          <a:stretch>
+            <a:fillRect/>
+          </a:stretch>
+        </p:blipFill>
+        <p:spPr>
+          <a:xfrm>
+            <a:off x="3630936" y="1389793"/>
+            <a:ext cx="3852215" cy="4861718"/>
+          </a:xfrm>
+          <a:prstGeom prst="rect">
+            <a:avLst/>
+          </a:prstGeom>
+        </p:spPr>
+      </p:pic>
+      <mc:AlternateContent xmlns:mc="http://schemas.openxmlformats.org/markup-compatibility/2006">
+        <mc:Choice xmlns:p14="http://schemas.microsoft.com/office/powerpoint/2010/main" Requires="p14">
+          <p:contentPart p14:bwMode="auto" r:id="rId3">
+            <p14:nvContentPartPr>
+              <p14:cNvPr id="5" name="Entrada de lápiz 4">
+                <a:extLst>
+                  <a:ext uri="{FF2B5EF4-FFF2-40B4-BE49-F238E27FC236}">
+                    <a16:creationId xmlns:a16="http://schemas.microsoft.com/office/drawing/2014/main" id="{9F5ABAE1-B358-3422-3954-E9A2F77D225A}"/>
+                  </a:ext>
+                </a:extLst>
+              </p14:cNvPr>
+              <p14:cNvContentPartPr/>
+              <p14:nvPr/>
+            </p14:nvContentPartPr>
+            <p14:xfrm>
+              <a:off x="4991848" y="4375433"/>
+              <a:ext cx="1202400" cy="19800"/>
+            </p14:xfrm>
+          </p:contentPart>
+        </mc:Choice>
+        <mc:Fallback>
+          <p:pic>
+            <p:nvPicPr>
+              <p:cNvPr id="5" name="Entrada de lápiz 4">
+                <a:extLst>
+                  <a:ext uri="{FF2B5EF4-FFF2-40B4-BE49-F238E27FC236}">
+                    <a16:creationId xmlns:a16="http://schemas.microsoft.com/office/drawing/2014/main" id="{9F5ABAE1-B358-3422-3954-E9A2F77D225A}"/>
+                  </a:ext>
+                </a:extLst>
+              </p:cNvPr>
+              <p:cNvPicPr/>
+              <p:nvPr/>
+            </p:nvPicPr>
+            <p:blipFill>
+              <a:blip r:embed="rId4"/>
+              <a:stretch>
+                <a:fillRect/>
+              </a:stretch>
+            </p:blipFill>
+            <p:spPr>
+              <a:xfrm>
+                <a:off x="4919848" y="4231793"/>
+                <a:ext cx="1346040" cy="307440"/>
+              </a:xfrm>
+              <a:prstGeom prst="rect">
+                <a:avLst/>
+              </a:prstGeom>
+            </p:spPr>
+          </p:pic>
+        </mc:Fallback>
+      </mc:AlternateContent>
+      <mc:AlternateContent xmlns:mc="http://schemas.openxmlformats.org/markup-compatibility/2006">
+        <mc:Choice xmlns:p14="http://schemas.microsoft.com/office/powerpoint/2010/main" Requires="p14">
+          <p:contentPart p14:bwMode="auto" r:id="rId5">
+            <p14:nvContentPartPr>
+              <p14:cNvPr id="6" name="Entrada de lápiz 5">
+                <a:extLst>
+                  <a:ext uri="{FF2B5EF4-FFF2-40B4-BE49-F238E27FC236}">
+                    <a16:creationId xmlns:a16="http://schemas.microsoft.com/office/drawing/2014/main" id="{DE4DADCA-15EE-732D-A2F2-3605DC48FC68}"/>
+                  </a:ext>
+                </a:extLst>
+              </p14:cNvPr>
+              <p14:cNvContentPartPr/>
+              <p14:nvPr/>
+            </p14:nvContentPartPr>
+            <p14:xfrm>
+              <a:off x="4693408" y="1831313"/>
+              <a:ext cx="468360" cy="333360"/>
+            </p14:xfrm>
+          </p:contentPart>
+        </mc:Choice>
+        <mc:Fallback>
+          <p:pic>
+            <p:nvPicPr>
+              <p:cNvPr id="6" name="Entrada de lápiz 5">
+                <a:extLst>
+                  <a:ext uri="{FF2B5EF4-FFF2-40B4-BE49-F238E27FC236}">
+                    <a16:creationId xmlns:a16="http://schemas.microsoft.com/office/drawing/2014/main" id="{DE4DADCA-15EE-732D-A2F2-3605DC48FC68}"/>
+                  </a:ext>
+                </a:extLst>
+              </p:cNvPr>
+              <p:cNvPicPr/>
+              <p:nvPr/>
+            </p:nvPicPr>
+            <p:blipFill>
+              <a:blip r:embed="rId6"/>
+              <a:stretch>
+                <a:fillRect/>
+              </a:stretch>
+            </p:blipFill>
+            <p:spPr>
+              <a:xfrm>
+                <a:off x="4621408" y="1687313"/>
+                <a:ext cx="612000" cy="621000"/>
+              </a:xfrm>
+              <a:prstGeom prst="rect">
+                <a:avLst/>
+              </a:prstGeom>
+            </p:spPr>
+          </p:pic>
+        </mc:Fallback>
+      </mc:AlternateContent>
+      <mc:AlternateContent xmlns:mc="http://schemas.openxmlformats.org/markup-compatibility/2006">
+        <mc:Choice xmlns:p14="http://schemas.microsoft.com/office/powerpoint/2010/main" Requires="p14">
+          <p:contentPart p14:bwMode="auto" r:id="rId7">
+            <p14:nvContentPartPr>
+              <p14:cNvPr id="7" name="Entrada de lápiz 6">
+                <a:extLst>
+                  <a:ext uri="{FF2B5EF4-FFF2-40B4-BE49-F238E27FC236}">
+                    <a16:creationId xmlns:a16="http://schemas.microsoft.com/office/drawing/2014/main" id="{8C45A6BF-B260-445B-6D52-34138BBC3D39}"/>
+                  </a:ext>
+                </a:extLst>
+              </p14:cNvPr>
+              <p14:cNvContentPartPr/>
+              <p14:nvPr/>
+            </p14:nvContentPartPr>
+            <p14:xfrm>
+              <a:off x="4698448" y="1902953"/>
+              <a:ext cx="456120" cy="28800"/>
+            </p14:xfrm>
+          </p:contentPart>
+        </mc:Choice>
+        <mc:Fallback>
+          <p:pic>
+            <p:nvPicPr>
+              <p:cNvPr id="7" name="Entrada de lápiz 6">
+                <a:extLst>
+                  <a:ext uri="{FF2B5EF4-FFF2-40B4-BE49-F238E27FC236}">
+                    <a16:creationId xmlns:a16="http://schemas.microsoft.com/office/drawing/2014/main" id="{8C45A6BF-B260-445B-6D52-34138BBC3D39}"/>
+                  </a:ext>
+                </a:extLst>
+              </p:cNvPr>
+              <p:cNvPicPr/>
+              <p:nvPr/>
+            </p:nvPicPr>
+            <p:blipFill>
+              <a:blip r:embed="rId8"/>
+              <a:stretch>
+                <a:fillRect/>
+              </a:stretch>
+            </p:blipFill>
+            <p:spPr>
+              <a:xfrm>
+                <a:off x="4626808" y="1758953"/>
+                <a:ext cx="599760" cy="316440"/>
+              </a:xfrm>
+              <a:prstGeom prst="rect">
+                <a:avLst/>
+              </a:prstGeom>
+            </p:spPr>
+          </p:pic>
+        </mc:Fallback>
+      </mc:AlternateContent>
     </p:spTree>
     <p:extLst>
       <p:ext uri="{BB962C8B-B14F-4D97-AF65-F5344CB8AC3E}">
@@ -3986,10 +4275,44 @@
           <a:bodyPr/>
           <a:lstStyle/>
           <a:p>
-            <a:endParaRPr lang="es-GT"/>
-          </a:p>
-        </p:txBody>
-      </p:sp>
+            <a:r>
+              <a:rPr lang="af-ZA" dirty="0"/>
+              <a:t>Comando trim para cortar cada seccion</a:t>
+            </a:r>
+            <a:endParaRPr lang="es-GT" dirty="0"/>
+          </a:p>
+        </p:txBody>
+      </p:sp>
+      <p:pic>
+        <p:nvPicPr>
+          <p:cNvPr id="4" name="Imagen 3">
+            <a:extLst>
+              <a:ext uri="{FF2B5EF4-FFF2-40B4-BE49-F238E27FC236}">
+                <a16:creationId xmlns:a16="http://schemas.microsoft.com/office/drawing/2014/main" id="{2447B3F8-1E40-9BA7-2EBB-3819B081DCBC}"/>
+              </a:ext>
+            </a:extLst>
+          </p:cNvPr>
+          <p:cNvPicPr>
+            <a:picLocks noChangeAspect="1"/>
+          </p:cNvPicPr>
+          <p:nvPr/>
+        </p:nvPicPr>
+        <p:blipFill>
+          <a:blip r:embed="rId2"/>
+          <a:stretch>
+            <a:fillRect/>
+          </a:stretch>
+        </p:blipFill>
+        <p:spPr>
+          <a:xfrm>
+            <a:off x="2520754" y="1482026"/>
+            <a:ext cx="6516009" cy="5010849"/>
+          </a:xfrm>
+          <a:prstGeom prst="rect">
+            <a:avLst/>
+          </a:prstGeom>
+        </p:spPr>
+      </p:pic>
     </p:spTree>
     <p:extLst>
       <p:ext uri="{BB962C8B-B14F-4D97-AF65-F5344CB8AC3E}">
@@ -4041,10 +4364,44 @@
           <a:bodyPr/>
           <a:lstStyle/>
           <a:p>
-            <a:endParaRPr lang="es-GT"/>
-          </a:p>
-        </p:txBody>
-      </p:sp>
+            <a:r>
+              <a:rPr lang="af-ZA" dirty="0"/>
+              <a:t>Ahora el comando es unir join</a:t>
+            </a:r>
+            <a:endParaRPr lang="es-GT" dirty="0"/>
+          </a:p>
+        </p:txBody>
+      </p:sp>
+      <p:pic>
+        <p:nvPicPr>
+          <p:cNvPr id="4" name="Imagen 3">
+            <a:extLst>
+              <a:ext uri="{FF2B5EF4-FFF2-40B4-BE49-F238E27FC236}">
+                <a16:creationId xmlns:a16="http://schemas.microsoft.com/office/drawing/2014/main" id="{FDA5F39C-47E4-BF52-2183-B087797E70C3}"/>
+              </a:ext>
+            </a:extLst>
+          </p:cNvPr>
+          <p:cNvPicPr>
+            <a:picLocks noChangeAspect="1"/>
+          </p:cNvPicPr>
+          <p:nvPr/>
+        </p:nvPicPr>
+        <p:blipFill>
+          <a:blip r:embed="rId2"/>
+          <a:stretch>
+            <a:fillRect/>
+          </a:stretch>
+        </p:blipFill>
+        <p:spPr>
+          <a:xfrm>
+            <a:off x="1835318" y="1623527"/>
+            <a:ext cx="7569861" cy="4524000"/>
+          </a:xfrm>
+          <a:prstGeom prst="rect">
+            <a:avLst/>
+          </a:prstGeom>
+        </p:spPr>
+      </p:pic>
     </p:spTree>
     <p:extLst>
       <p:ext uri="{BB962C8B-B14F-4D97-AF65-F5344CB8AC3E}">
